--- a/VKR/presentation/drafts/slide_08.pptx
+++ b/VKR/presentation/drafts/slide_08.pptx
@@ -502,7 +502,7 @@
           <a:p>
             <a:r>
               <a:rPr lang="en-US" dirty="0"/>
-              <a:t>По качеству: лучшей оказалась модель LightGBM — она снижает среднюю абсолютную ошибку на 39 процентов относительно наивного предиктора, который просто переносит текущее значение. Отдельно я проверил корректность переноса модели из Python в приложение: прогнозы исходной модели на Python и модели в формате ONNX на C# совпали с медианным расхождением в стотысячные доли килограмма, а в 99 процентах случаев расхождение меньше десятой доли килограмма. То есть конвертация в ONNX точность не теряет.</a:t>
+              <a:t>По качеству я сравнил три модели. Наивный предиктор просто переносит текущее значение — его ошибка 2,5 килограмма. Линейная регрессия по последним точкам — чуть лучше. Градиентный бустинг LightGBM даёт ошибку 1,8 килограмма, это на 29 процентов точнее наивного. Но самое важное — справа: на сессиях, где силовые показатели резко просели из-за травмы или паузы, модель снижает ошибку уже на 43 процента и, главное, прогнозирует именно восстановление, а не застой на низком уровне — раньше такие случаи были для модели неизвестной территорией. Отдельно я убедился, что перенос модели из Python в приложение через формат ONNX не теряет точности: расхождение исчезающе мало, а сам прогноз считается на устройстве за единицы миллисекунд, без сети.</a:t>
             </a:r>
             <a:endParaRPr lang="en-US" dirty="0"/>
           </a:p>
@@ -908,7 +908,7 @@
                 <a:ea typeface="Georgia" pitchFamily="34" charset="-122"/>
                 <a:cs typeface="Georgia" pitchFamily="34" charset="-120"/>
               </a:rPr>
-              <a:t>ML-модуль: результаты обучения</a:t>
+              <a:t>ML-модуль: результаты</a:t>
             </a:r>
             <a:endParaRPr lang="en-US" sz="3400" dirty="0"/>
           </a:p>
@@ -922,16 +922,16 @@
         </p:nvSpPr>
         <p:spPr>
           <a:xfrm>
-            <a:off x="548640" y="1554480"/>
-            <a:ext cx="5303520" cy="3291840"/>
+            <a:off x="548640" y="1371600"/>
+            <a:ext cx="5486400" cy="3566160"/>
           </a:xfrm>
           <a:prstGeom prst="roundRect">
             <a:avLst>
-              <a:gd name="adj" fmla="val 2778"/>
+              <a:gd name="adj" fmla="val 2564"/>
             </a:avLst>
           </a:prstGeom>
           <a:solidFill>
-            <a:srgbClr val="1E2761"/>
+            <a:srgbClr val="EAF0FF"/>
           </a:solidFill>
           <a:ln/>
         </p:spPr>
@@ -944,8 +944,8 @@
         </p:nvSpPr>
         <p:spPr>
           <a:xfrm>
-            <a:off x="548640" y="2011680"/>
-            <a:ext cx="5303520" cy="1280160"/>
+            <a:off x="777240" y="1481328"/>
+            <a:ext cx="5029200" cy="411480"/>
           </a:xfrm>
           <a:prstGeom prst="rect">
             <a:avLst/>
@@ -957,21 +957,21 @@
           <a:bodyPr wrap="square" rtlCol="0" anchor="ctr"/>
           <a:lstStyle/>
           <a:p>
-            <a:pPr algn="ctr" indent="0" marL="0">
+            <a:pPr indent="0" marL="0">
               <a:buNone/>
             </a:pPr>
             <a:r>
-              <a:rPr lang="en-US" sz="6400" b="1" dirty="0">
+              <a:rPr lang="en-US" sz="1450" b="1" dirty="0">
                 <a:solidFill>
-                  <a:srgbClr val="FFFFFF"/>
+                  <a:srgbClr val="1E2761"/>
                 </a:solidFill>
                 <a:latin typeface="Georgia" pitchFamily="34" charset="0"/>
                 <a:ea typeface="Georgia" pitchFamily="34" charset="-122"/>
                 <a:cs typeface="Georgia" pitchFamily="34" charset="-120"/>
               </a:rPr>
-              <a:t>−39 %</a:t>
-            </a:r>
-            <a:endParaRPr lang="en-US" sz="6400" dirty="0"/>
+              <a:t>Средняя ошибка прогноза 1ПМ (MAE), кг</a:t>
+            </a:r>
+            <a:endParaRPr lang="en-US" sz="1450" dirty="0"/>
           </a:p>
         </p:txBody>
       </p:sp>
@@ -983,8 +983,8 @@
         </p:nvSpPr>
         <p:spPr>
           <a:xfrm>
-            <a:off x="731520" y="3383280"/>
-            <a:ext cx="4937760" cy="914400"/>
+            <a:off x="868680" y="1929384"/>
+            <a:ext cx="4937760" cy="274320"/>
           </a:xfrm>
           <a:prstGeom prst="rect">
             <a:avLst/>
@@ -996,38 +996,21 @@
           <a:bodyPr wrap="square" rtlCol="0" anchor="ctr"/>
           <a:lstStyle/>
           <a:p>
-            <a:pPr algn="ctr" indent="0" marL="0">
+            <a:pPr indent="0" marL="0">
               <a:buNone/>
             </a:pPr>
             <a:r>
-              <a:rPr lang="en-US" sz="1600" dirty="0">
+              <a:rPr lang="en-US" sz="1200" dirty="0">
                 <a:solidFill>
-                  <a:srgbClr val="CADCFC"/>
+                  <a:srgbClr val="44474F"/>
                 </a:solidFill>
                 <a:latin typeface="Calibri" pitchFamily="34" charset="0"/>
                 <a:ea typeface="Calibri" pitchFamily="34" charset="-122"/>
                 <a:cs typeface="Calibri" pitchFamily="34" charset="-120"/>
               </a:rPr>
-              <a:t>снижение MAE</a:t>
-            </a:r>
-            <a:endParaRPr lang="en-US" sz="1600" dirty="0"/>
-          </a:p>
-          <a:p>
-            <a:pPr algn="ctr" indent="0" marL="0">
-              <a:buNone/>
-            </a:pPr>
-            <a:r>
-              <a:rPr lang="en-US" sz="1600" dirty="0">
-                <a:solidFill>
-                  <a:srgbClr val="CADCFC"/>
-                </a:solidFill>
-                <a:latin typeface="Calibri" pitchFamily="34" charset="0"/>
-                <a:ea typeface="Calibri" pitchFamily="34" charset="-122"/>
-                <a:cs typeface="Calibri" pitchFamily="34" charset="-120"/>
-              </a:rPr>
-              <a:t>LightGBM против наивного предиктора</a:t>
-            </a:r>
-            <a:endParaRPr lang="en-US" sz="1600" dirty="0"/>
+              <a:t>Наивный (последнее значение)</a:t>
+            </a:r>
+            <a:endParaRPr lang="en-US" sz="1200" dirty="0"/>
           </a:p>
         </p:txBody>
       </p:sp>
@@ -1039,16 +1022,16 @@
         </p:nvSpPr>
         <p:spPr>
           <a:xfrm>
-            <a:off x="6217920" y="1554480"/>
-            <a:ext cx="5394960" cy="3291840"/>
+            <a:off x="868680" y="2240280"/>
+            <a:ext cx="3930513" cy="347472"/>
           </a:xfrm>
           <a:prstGeom prst="roundRect">
             <a:avLst>
-              <a:gd name="adj" fmla="val 2778"/>
+              <a:gd name="adj" fmla="val 10526"/>
             </a:avLst>
           </a:prstGeom>
           <a:solidFill>
-            <a:srgbClr val="EAF0FF"/>
+            <a:srgbClr val="9AA0A6"/>
           </a:solidFill>
           <a:ln/>
         </p:spPr>
@@ -1061,8 +1044,8 @@
         </p:nvSpPr>
         <p:spPr>
           <a:xfrm>
-            <a:off x="6400800" y="1783080"/>
-            <a:ext cx="5029200" cy="457200"/>
+            <a:off x="4872345" y="2194560"/>
+            <a:ext cx="914400" cy="438912"/>
           </a:xfrm>
           <a:prstGeom prst="rect">
             <a:avLst/>
@@ -1074,7 +1057,7 @@
           <a:bodyPr wrap="square" rtlCol="0" anchor="ctr"/>
           <a:lstStyle/>
           <a:p>
-            <a:pPr algn="ctr" indent="0" marL="0">
+            <a:pPr indent="0" marL="0">
               <a:buNone/>
             </a:pPr>
             <a:r>
@@ -1086,7 +1069,7 @@
                 <a:ea typeface="Georgia" pitchFamily="34" charset="-122"/>
                 <a:cs typeface="Georgia" pitchFamily="34" charset="-120"/>
               </a:rPr>
-              <a:t>СООТВЕТСТВИЕ КОНВЕЙЕРОВ ПРИЗНАКОВ</a:t>
+              <a:t>2,54</a:t>
             </a:r>
             <a:endParaRPr lang="en-US" sz="1500" dirty="0"/>
           </a:p>
@@ -1100,8 +1083,8 @@
         </p:nvSpPr>
         <p:spPr>
           <a:xfrm>
-            <a:off x="6400800" y="2468880"/>
-            <a:ext cx="5029200" cy="2103120"/>
+            <a:off x="868680" y="2770632"/>
+            <a:ext cx="4937760" cy="274320"/>
           </a:xfrm>
           <a:prstGeom prst="rect">
             <a:avLst/>
@@ -1110,14 +1093,14 @@
           <a:ln/>
         </p:spPr>
         <p:txBody>
-          <a:bodyPr wrap="square" rtlCol="0" anchor="t"/>
+          <a:bodyPr wrap="square" rtlCol="0" anchor="ctr"/>
           <a:lstStyle/>
           <a:p>
-            <a:pPr algn="ctr" indent="0" marL="0">
+            <a:pPr indent="0" marL="0">
               <a:buNone/>
             </a:pPr>
             <a:r>
-              <a:rPr lang="en-US" sz="1500" dirty="0">
+              <a:rPr lang="en-US" sz="1200" dirty="0">
                 <a:solidFill>
                   <a:srgbClr val="44474F"/>
                 </a:solidFill>
@@ -1125,14 +1108,199 @@
                 <a:ea typeface="Calibri" pitchFamily="34" charset="-122"/>
                 <a:cs typeface="Calibri" pitchFamily="34" charset="-120"/>
               </a:rPr>
-              <a:t>Python (LightGBM)  ↔  C# (ONNX Runtime)
-</a:t>
-            </a:r>
-            <a:pPr algn="ctr" indent="0" marL="0">
+              <a:t>Лин. регрессия (5 точек)</a:t>
+            </a:r>
+            <a:endParaRPr lang="en-US" sz="1200" dirty="0"/>
+          </a:p>
+        </p:txBody>
+      </p:sp>
+      <p:sp>
+        <p:nvSpPr>
+          <p:cNvPr id="9" name="Shape 7"/>
+          <p:cNvSpPr/>
+          <p:nvPr/>
+        </p:nvSpPr>
+        <p:spPr>
+          <a:xfrm>
+            <a:off x="868680" y="3081528"/>
+            <a:ext cx="3760294" cy="347472"/>
+          </a:xfrm>
+          <a:prstGeom prst="roundRect">
+            <a:avLst>
+              <a:gd name="adj" fmla="val 10526"/>
+            </a:avLst>
+          </a:prstGeom>
+          <a:solidFill>
+            <a:srgbClr val="7E9AD6"/>
+          </a:solidFill>
+          <a:ln/>
+        </p:spPr>
+      </p:sp>
+      <p:sp>
+        <p:nvSpPr>
+          <p:cNvPr id="10" name="Text 8"/>
+          <p:cNvSpPr/>
+          <p:nvPr/>
+        </p:nvSpPr>
+        <p:spPr>
+          <a:xfrm>
+            <a:off x="4702126" y="3035808"/>
+            <a:ext cx="914400" cy="438912"/>
+          </a:xfrm>
+          <a:prstGeom prst="rect">
+            <a:avLst/>
+          </a:prstGeom>
+          <a:noFill/>
+          <a:ln/>
+        </p:spPr>
+        <p:txBody>
+          <a:bodyPr wrap="square" rtlCol="0" anchor="ctr"/>
+          <a:lstStyle/>
+          <a:p>
+            <a:pPr indent="0" marL="0">
               <a:buNone/>
             </a:pPr>
             <a:r>
-              <a:rPr lang="en-US" sz="1700" b="1" dirty="0">
+              <a:rPr lang="en-US" sz="1500" b="1" dirty="0">
+                <a:solidFill>
+                  <a:srgbClr val="1E2761"/>
+                </a:solidFill>
+                <a:latin typeface="Georgia" pitchFamily="34" charset="0"/>
+                <a:ea typeface="Georgia" pitchFamily="34" charset="-122"/>
+                <a:cs typeface="Georgia" pitchFamily="34" charset="-120"/>
+              </a:rPr>
+              <a:t>2,43</a:t>
+            </a:r>
+            <a:endParaRPr lang="en-US" sz="1500" dirty="0"/>
+          </a:p>
+        </p:txBody>
+      </p:sp>
+      <p:sp>
+        <p:nvSpPr>
+          <p:cNvPr id="11" name="Text 9"/>
+          <p:cNvSpPr/>
+          <p:nvPr/>
+        </p:nvSpPr>
+        <p:spPr>
+          <a:xfrm>
+            <a:off x="868680" y="3611880"/>
+            <a:ext cx="4937760" cy="274320"/>
+          </a:xfrm>
+          <a:prstGeom prst="rect">
+            <a:avLst/>
+          </a:prstGeom>
+          <a:noFill/>
+          <a:ln/>
+        </p:spPr>
+        <p:txBody>
+          <a:bodyPr wrap="square" rtlCol="0" anchor="ctr"/>
+          <a:lstStyle/>
+          <a:p>
+            <a:pPr indent="0" marL="0">
+              <a:buNone/>
+            </a:pPr>
+            <a:r>
+              <a:rPr lang="en-US" sz="1200" dirty="0">
+                <a:solidFill>
+                  <a:srgbClr val="44474F"/>
+                </a:solidFill>
+                <a:latin typeface="Calibri" pitchFamily="34" charset="0"/>
+                <a:ea typeface="Calibri" pitchFamily="34" charset="-122"/>
+                <a:cs typeface="Calibri" pitchFamily="34" charset="-120"/>
+              </a:rPr>
+              <a:t>LightGBM</a:t>
+            </a:r>
+            <a:endParaRPr lang="en-US" sz="1200" dirty="0"/>
+          </a:p>
+        </p:txBody>
+      </p:sp>
+      <p:sp>
+        <p:nvSpPr>
+          <p:cNvPr id="12" name="Shape 10"/>
+          <p:cNvSpPr/>
+          <p:nvPr/>
+        </p:nvSpPr>
+        <p:spPr>
+          <a:xfrm>
+            <a:off x="868680" y="3922776"/>
+            <a:ext cx="2816352" cy="347472"/>
+          </a:xfrm>
+          <a:prstGeom prst="roundRect">
+            <a:avLst>
+              <a:gd name="adj" fmla="val 10526"/>
+            </a:avLst>
+          </a:prstGeom>
+          <a:solidFill>
+            <a:srgbClr val="F96167"/>
+          </a:solidFill>
+          <a:ln/>
+        </p:spPr>
+      </p:sp>
+      <p:sp>
+        <p:nvSpPr>
+          <p:cNvPr id="13" name="Text 11"/>
+          <p:cNvSpPr/>
+          <p:nvPr/>
+        </p:nvSpPr>
+        <p:spPr>
+          <a:xfrm>
+            <a:off x="3758184" y="3877056"/>
+            <a:ext cx="914400" cy="438912"/>
+          </a:xfrm>
+          <a:prstGeom prst="rect">
+            <a:avLst/>
+          </a:prstGeom>
+          <a:noFill/>
+          <a:ln/>
+        </p:spPr>
+        <p:txBody>
+          <a:bodyPr wrap="square" rtlCol="0" anchor="ctr"/>
+          <a:lstStyle/>
+          <a:p>
+            <a:pPr indent="0" marL="0">
+              <a:buNone/>
+            </a:pPr>
+            <a:r>
+              <a:rPr lang="en-US" sz="1500" b="1" dirty="0">
+                <a:solidFill>
+                  <a:srgbClr val="1E2761"/>
+                </a:solidFill>
+                <a:latin typeface="Georgia" pitchFamily="34" charset="0"/>
+                <a:ea typeface="Georgia" pitchFamily="34" charset="-122"/>
+                <a:cs typeface="Georgia" pitchFamily="34" charset="-120"/>
+              </a:rPr>
+              <a:t>1,82</a:t>
+            </a:r>
+            <a:endParaRPr lang="en-US" sz="1500" dirty="0"/>
+          </a:p>
+        </p:txBody>
+      </p:sp>
+      <p:sp>
+        <p:nvSpPr>
+          <p:cNvPr id="14" name="Text 12"/>
+          <p:cNvSpPr/>
+          <p:nvPr/>
+        </p:nvSpPr>
+        <p:spPr>
+          <a:xfrm>
+            <a:off x="777240" y="4572000"/>
+            <a:ext cx="5029200" cy="320040"/>
+          </a:xfrm>
+          <a:prstGeom prst="rect">
+            <a:avLst/>
+          </a:prstGeom>
+          <a:noFill/>
+          <a:ln/>
+        </p:spPr>
+        <p:txBody>
+          <a:bodyPr wrap="square" rtlCol="0" anchor="ctr"/>
+          <a:lstStyle/>
+          <a:p>
+            <a:pPr indent="0" marL="0">
+              <a:buNone/>
+            </a:pPr>
+            <a:r>
+              <a:rPr lang="en-US" sz="1300" i="1" dirty="0">
                 <a:solidFill>
                   <a:srgbClr val="1E2761"/>
                 </a:solidFill>
@@ -1140,14 +1308,286 @@
                 <a:ea typeface="Calibri" pitchFamily="34" charset="-122"/>
                 <a:cs typeface="Calibri" pitchFamily="34" charset="-120"/>
               </a:rPr>
-              <a:t>медиана расхождения:  1,6 × 10⁻⁵ кг
-</a:t>
-            </a:r>
+              <a:t>LightGBM — на 29 % точнее наивного предиктора</a:t>
+            </a:r>
+            <a:endParaRPr lang="en-US" sz="1300" dirty="0"/>
+          </a:p>
+        </p:txBody>
+      </p:sp>
+      <p:sp>
+        <p:nvSpPr>
+          <p:cNvPr id="15" name="Shape 13"/>
+          <p:cNvSpPr/>
+          <p:nvPr/>
+        </p:nvSpPr>
+        <p:spPr>
+          <a:xfrm>
+            <a:off x="6217920" y="1371600"/>
+            <a:ext cx="5394960" cy="3566160"/>
+          </a:xfrm>
+          <a:prstGeom prst="roundRect">
+            <a:avLst>
+              <a:gd name="adj" fmla="val 2564"/>
+            </a:avLst>
+          </a:prstGeom>
+          <a:solidFill>
+            <a:srgbClr val="1E2761"/>
+          </a:solidFill>
+          <a:ln/>
+        </p:spPr>
+      </p:sp>
+      <p:sp>
+        <p:nvSpPr>
+          <p:cNvPr id="16" name="Text 14"/>
+          <p:cNvSpPr/>
+          <p:nvPr/>
+        </p:nvSpPr>
+        <p:spPr>
+          <a:xfrm>
+            <a:off x="6400800" y="1536192"/>
+            <a:ext cx="5029200" cy="731520"/>
+          </a:xfrm>
+          <a:prstGeom prst="rect">
+            <a:avLst/>
+          </a:prstGeom>
+          <a:noFill/>
+          <a:ln/>
+        </p:spPr>
+        <p:txBody>
+          <a:bodyPr wrap="square" rtlCol="0" anchor="ctr"/>
+          <a:lstStyle/>
+          <a:p>
             <a:pPr algn="ctr" indent="0" marL="0">
               <a:buNone/>
             </a:pPr>
             <a:r>
-              <a:rPr lang="en-US" sz="1700" b="1" dirty="0">
+              <a:rPr lang="en-US" sz="1500" b="1" dirty="0">
+                <a:solidFill>
+                  <a:srgbClr val="FFFFFF"/>
+                </a:solidFill>
+                <a:latin typeface="Georgia" pitchFamily="34" charset="0"/>
+                <a:ea typeface="Georgia" pitchFamily="34" charset="-122"/>
+                <a:cs typeface="Georgia" pitchFamily="34" charset="-120"/>
+              </a:rPr>
+              <a:t>УСТОЙЧИВОСТЬ К ПРОСАДКАМ</a:t>
+            </a:r>
+            <a:endParaRPr lang="en-US" sz="1500" dirty="0"/>
+          </a:p>
+          <a:p>
+            <a:pPr algn="ctr" indent="0" marL="0">
+              <a:buNone/>
+            </a:pPr>
+            <a:r>
+              <a:rPr lang="en-US" sz="1500" b="1" dirty="0">
+                <a:solidFill>
+                  <a:srgbClr val="FFFFFF"/>
+                </a:solidFill>
+                <a:latin typeface="Georgia" pitchFamily="34" charset="0"/>
+                <a:ea typeface="Georgia" pitchFamily="34" charset="-122"/>
+                <a:cs typeface="Georgia" pitchFamily="34" charset="-120"/>
+              </a:rPr>
+              <a:t>(травмы, длительные паузы)</a:t>
+            </a:r>
+            <a:endParaRPr lang="en-US" sz="1500" dirty="0"/>
+          </a:p>
+        </p:txBody>
+      </p:sp>
+      <p:sp>
+        <p:nvSpPr>
+          <p:cNvPr id="17" name="Text 15"/>
+          <p:cNvSpPr/>
+          <p:nvPr/>
+        </p:nvSpPr>
+        <p:spPr>
+          <a:xfrm>
+            <a:off x="6217920" y="2286000"/>
+            <a:ext cx="5394960" cy="1051560"/>
+          </a:xfrm>
+          <a:prstGeom prst="rect">
+            <a:avLst/>
+          </a:prstGeom>
+          <a:noFill/>
+          <a:ln/>
+        </p:spPr>
+        <p:txBody>
+          <a:bodyPr wrap="square" rtlCol="0" anchor="ctr"/>
+          <a:lstStyle/>
+          <a:p>
+            <a:pPr algn="ctr" indent="0" marL="0">
+              <a:buNone/>
+            </a:pPr>
+            <a:r>
+              <a:rPr lang="en-US" sz="5800" b="1" dirty="0">
+                <a:solidFill>
+                  <a:srgbClr val="FFFFFF"/>
+                </a:solidFill>
+                <a:latin typeface="Georgia" pitchFamily="34" charset="0"/>
+                <a:ea typeface="Georgia" pitchFamily="34" charset="-122"/>
+                <a:cs typeface="Georgia" pitchFamily="34" charset="-120"/>
+              </a:rPr>
+              <a:t>−43 %</a:t>
+            </a:r>
+            <a:endParaRPr lang="en-US" sz="5800" dirty="0"/>
+          </a:p>
+        </p:txBody>
+      </p:sp>
+      <p:sp>
+        <p:nvSpPr>
+          <p:cNvPr id="18" name="Text 16"/>
+          <p:cNvSpPr/>
+          <p:nvPr/>
+        </p:nvSpPr>
+        <p:spPr>
+          <a:xfrm>
+            <a:off x="6400800" y="3383280"/>
+            <a:ext cx="5029200" cy="640080"/>
+          </a:xfrm>
+          <a:prstGeom prst="rect">
+            <a:avLst/>
+          </a:prstGeom>
+          <a:noFill/>
+          <a:ln/>
+        </p:spPr>
+        <p:txBody>
+          <a:bodyPr wrap="square" rtlCol="0" anchor="ctr"/>
+          <a:lstStyle/>
+          <a:p>
+            <a:pPr algn="ctr" indent="0" marL="0">
+              <a:buNone/>
+            </a:pPr>
+            <a:r>
+              <a:rPr lang="en-US" sz="1400" dirty="0">
+                <a:solidFill>
+                  <a:srgbClr val="CADCFC"/>
+                </a:solidFill>
+                <a:latin typeface="Calibri" pitchFamily="34" charset="0"/>
+                <a:ea typeface="Calibri" pitchFamily="34" charset="-122"/>
+                <a:cs typeface="Calibri" pitchFamily="34" charset="-120"/>
+              </a:rPr>
+              <a:t>ошибки на сессиях со спадом 1ПМ:</a:t>
+            </a:r>
+            <a:endParaRPr lang="en-US" sz="1400" dirty="0"/>
+          </a:p>
+          <a:p>
+            <a:pPr algn="ctr" indent="0" marL="0">
+              <a:buNone/>
+            </a:pPr>
+            <a:r>
+              <a:rPr lang="en-US" sz="1400" dirty="0">
+                <a:solidFill>
+                  <a:srgbClr val="CADCFC"/>
+                </a:solidFill>
+                <a:latin typeface="Calibri" pitchFamily="34" charset="0"/>
+                <a:ea typeface="Calibri" pitchFamily="34" charset="-122"/>
+                <a:cs typeface="Calibri" pitchFamily="34" charset="-120"/>
+              </a:rPr>
+              <a:t>2,23 → 1,26 кг против наивного</a:t>
+            </a:r>
+            <a:endParaRPr lang="en-US" sz="1400" dirty="0"/>
+          </a:p>
+        </p:txBody>
+      </p:sp>
+      <p:sp>
+        <p:nvSpPr>
+          <p:cNvPr id="19" name="Text 17"/>
+          <p:cNvSpPr/>
+          <p:nvPr/>
+        </p:nvSpPr>
+        <p:spPr>
+          <a:xfrm>
+            <a:off x="6492240" y="4114800"/>
+            <a:ext cx="4846320" cy="731520"/>
+          </a:xfrm>
+          <a:prstGeom prst="rect">
+            <a:avLst/>
+          </a:prstGeom>
+          <a:noFill/>
+          <a:ln/>
+        </p:spPr>
+        <p:txBody>
+          <a:bodyPr wrap="square" rtlCol="0" anchor="ctr"/>
+          <a:lstStyle/>
+          <a:p>
+            <a:pPr algn="ctr" indent="0" marL="0">
+              <a:buNone/>
+            </a:pPr>
+            <a:r>
+              <a:rPr lang="en-US" sz="1300" i="1" dirty="0">
+                <a:solidFill>
+                  <a:srgbClr val="CADCFC"/>
+                </a:solidFill>
+                <a:latin typeface="Calibri" pitchFamily="34" charset="0"/>
+                <a:ea typeface="Calibri" pitchFamily="34" charset="-122"/>
+                <a:cs typeface="Calibri" pitchFamily="34" charset="-120"/>
+              </a:rPr>
+              <a:t>Модель прогнозирует восстановление, а не застой на просевшем уровне.</a:t>
+            </a:r>
+            <a:endParaRPr lang="en-US" sz="1300" dirty="0"/>
+          </a:p>
+        </p:txBody>
+      </p:sp>
+      <p:sp>
+        <p:nvSpPr>
+          <p:cNvPr id="20" name="Shape 18"/>
+          <p:cNvSpPr/>
+          <p:nvPr/>
+        </p:nvSpPr>
+        <p:spPr>
+          <a:xfrm>
+            <a:off x="548640" y="5166360"/>
+            <a:ext cx="11064240" cy="822960"/>
+          </a:xfrm>
+          <a:prstGeom prst="roundRect">
+            <a:avLst>
+              <a:gd name="adj" fmla="val 11111"/>
+            </a:avLst>
+          </a:prstGeom>
+          <a:solidFill>
+            <a:srgbClr val="CADCFC"/>
+          </a:solidFill>
+          <a:ln/>
+        </p:spPr>
+      </p:sp>
+      <p:sp>
+        <p:nvSpPr>
+          <p:cNvPr id="21" name="Text 19"/>
+          <p:cNvSpPr/>
+          <p:nvPr/>
+        </p:nvSpPr>
+        <p:spPr>
+          <a:xfrm>
+            <a:off x="822960" y="5166360"/>
+            <a:ext cx="10515600" cy="822960"/>
+          </a:xfrm>
+          <a:prstGeom prst="rect">
+            <a:avLst/>
+          </a:prstGeom>
+          <a:noFill/>
+          <a:ln/>
+        </p:spPr>
+        <p:txBody>
+          <a:bodyPr wrap="square" rtlCol="0" anchor="ctr"/>
+          <a:lstStyle/>
+          <a:p>
+            <a:pPr indent="0" marL="0">
+              <a:buNone/>
+            </a:pPr>
+            <a:r>
+              <a:rPr lang="en-US" sz="1350" dirty="0">
+                <a:solidFill>
+                  <a:srgbClr val="44474F"/>
+                </a:solidFill>
+                <a:latin typeface="Calibri" pitchFamily="34" charset="0"/>
+                <a:ea typeface="Calibri" pitchFamily="34" charset="-122"/>
+                <a:cs typeface="Calibri" pitchFamily="34" charset="-120"/>
+              </a:rPr>
+              <a:t>Перенос Python (LightGBM) → C# (ONNX Runtime) без потери точности: </a:t>
+            </a:r>
+            <a:pPr indent="0" marL="0">
+              <a:buNone/>
+            </a:pPr>
+            <a:r>
+              <a:rPr lang="en-US" sz="1350" b="1" dirty="0">
                 <a:solidFill>
                   <a:srgbClr val="1E2761"/>
                 </a:solidFill>
@@ -1155,15 +1595,29 @@
                 <a:ea typeface="Calibri" pitchFamily="34" charset="-122"/>
                 <a:cs typeface="Calibri" pitchFamily="34" charset="-120"/>
               </a:rPr>
-              <a:t>99-й процентиль:  0,082 кг</a:t>
-            </a:r>
-            <a:endParaRPr lang="en-US" sz="1500" dirty="0"/>
-          </a:p>
-        </p:txBody>
-      </p:sp>
-      <p:sp>
-        <p:nvSpPr>
-          <p:cNvPr id="9" name="Text 7"/>
+              <a:t>медиана расхождения 1,6 × 10⁻⁵ кг</a:t>
+            </a:r>
+            <a:pPr indent="0" marL="0">
+              <a:buNone/>
+            </a:pPr>
+            <a:r>
+              <a:rPr lang="en-US" sz="1350" dirty="0">
+                <a:solidFill>
+                  <a:srgbClr val="44474F"/>
+                </a:solidFill>
+                <a:latin typeface="Calibri" pitchFamily="34" charset="0"/>
+                <a:ea typeface="Calibri" pitchFamily="34" charset="-122"/>
+                <a:cs typeface="Calibri" pitchFamily="34" charset="-120"/>
+              </a:rPr>
+              <a:t>, исполнение прямо на устройстве за 4–8 мс.</a:t>
+            </a:r>
+            <a:endParaRPr lang="en-US" sz="1350" dirty="0"/>
+          </a:p>
+        </p:txBody>
+      </p:sp>
+      <p:sp>
+        <p:nvSpPr>
+          <p:cNvPr id="22" name="Text 20"/>
           <p:cNvSpPr/>
           <p:nvPr/>
         </p:nvSpPr>
@@ -1202,7 +1656,7 @@
       </p:sp>
       <p:sp>
         <p:nvSpPr>
-          <p:cNvPr id="10" name="Text 8"/>
+          <p:cNvPr id="23" name="Text 21"/>
           <p:cNvSpPr/>
           <p:nvPr/>
         </p:nvSpPr>
